--- a/Т_И_С/ПМ1_ТИС_Установка и сопровождение программного и аппаратного обеспечения/РО1-5-Администрировать Windows и Windows Server на базовом уровне/05-Объекты Active Directory.pptx
+++ b/Т_И_С/ПМ1_ТИС_Установка и сопровождение программного и аппаратного обеспечения/РО1-5-Администрировать Windows и Windows Server на базовом уровне/05-Объекты Active Directory.pptx
@@ -332,7 +332,7 @@
           <a:p>
             <a:fld id="{5BCAD085-E8A6-8845-BD4E-CB4CCA059FC4}" type="datetimeFigureOut">
               <a:rPr lang="en-US" smtClean="0"/>
-              <a:t>7/18/2026</a:t>
+              <a:t>8/5/2026</a:t>
             </a:fld>
             <a:endParaRPr lang="en-US"/>
           </a:p>
@@ -500,7 +500,7 @@
           <a:p>
             <a:fld id="{5BCAD085-E8A6-8845-BD4E-CB4CCA059FC4}" type="datetimeFigureOut">
               <a:rPr lang="en-US" smtClean="0"/>
-              <a:t>7/18/2026</a:t>
+              <a:t>8/5/2026</a:t>
             </a:fld>
             <a:endParaRPr lang="en-US"/>
           </a:p>
@@ -678,7 +678,7 @@
           <a:p>
             <a:fld id="{5BCAD085-E8A6-8845-BD4E-CB4CCA059FC4}" type="datetimeFigureOut">
               <a:rPr lang="en-US" smtClean="0"/>
-              <a:t>7/18/2026</a:t>
+              <a:t>8/5/2026</a:t>
             </a:fld>
             <a:endParaRPr lang="en-US"/>
           </a:p>
@@ -846,7 +846,7 @@
           <a:p>
             <a:fld id="{5BCAD085-E8A6-8845-BD4E-CB4CCA059FC4}" type="datetimeFigureOut">
               <a:rPr lang="en-US" smtClean="0"/>
-              <a:t>7/18/2026</a:t>
+              <a:t>8/5/2026</a:t>
             </a:fld>
             <a:endParaRPr lang="en-US"/>
           </a:p>
@@ -1091,7 +1091,7 @@
           <a:p>
             <a:fld id="{5BCAD085-E8A6-8845-BD4E-CB4CCA059FC4}" type="datetimeFigureOut">
               <a:rPr lang="en-US" smtClean="0"/>
-              <a:t>7/18/2026</a:t>
+              <a:t>8/5/2026</a:t>
             </a:fld>
             <a:endParaRPr lang="en-US"/>
           </a:p>
@@ -1376,7 +1376,7 @@
           <a:p>
             <a:fld id="{5BCAD085-E8A6-8845-BD4E-CB4CCA059FC4}" type="datetimeFigureOut">
               <a:rPr lang="en-US" smtClean="0"/>
-              <a:t>7/18/2026</a:t>
+              <a:t>8/5/2026</a:t>
             </a:fld>
             <a:endParaRPr lang="en-US"/>
           </a:p>
@@ -1795,7 +1795,7 @@
           <a:p>
             <a:fld id="{5BCAD085-E8A6-8845-BD4E-CB4CCA059FC4}" type="datetimeFigureOut">
               <a:rPr lang="en-US" smtClean="0"/>
-              <a:t>7/18/2026</a:t>
+              <a:t>8/5/2026</a:t>
             </a:fld>
             <a:endParaRPr lang="en-US"/>
           </a:p>
@@ -1912,7 +1912,7 @@
           <a:p>
             <a:fld id="{5BCAD085-E8A6-8845-BD4E-CB4CCA059FC4}" type="datetimeFigureOut">
               <a:rPr lang="en-US" smtClean="0"/>
-              <a:t>7/18/2026</a:t>
+              <a:t>8/5/2026</a:t>
             </a:fld>
             <a:endParaRPr lang="en-US"/>
           </a:p>
@@ -2007,7 +2007,7 @@
           <a:p>
             <a:fld id="{5BCAD085-E8A6-8845-BD4E-CB4CCA059FC4}" type="datetimeFigureOut">
               <a:rPr lang="en-US" smtClean="0"/>
-              <a:t>7/18/2026</a:t>
+              <a:t>8/5/2026</a:t>
             </a:fld>
             <a:endParaRPr lang="en-US"/>
           </a:p>
@@ -2282,7 +2282,7 @@
           <a:p>
             <a:fld id="{5BCAD085-E8A6-8845-BD4E-CB4CCA059FC4}" type="datetimeFigureOut">
               <a:rPr lang="en-US" smtClean="0"/>
-              <a:t>7/18/2026</a:t>
+              <a:t>8/5/2026</a:t>
             </a:fld>
             <a:endParaRPr lang="en-US"/>
           </a:p>
@@ -2534,7 +2534,7 @@
           <a:p>
             <a:fld id="{5BCAD085-E8A6-8845-BD4E-CB4CCA059FC4}" type="datetimeFigureOut">
               <a:rPr lang="en-US" smtClean="0"/>
-              <a:t>7/18/2026</a:t>
+              <a:t>8/5/2026</a:t>
             </a:fld>
             <a:endParaRPr lang="en-US"/>
           </a:p>
@@ -2745,7 +2745,7 @@
           <a:p>
             <a:fld id="{5BCAD085-E8A6-8845-BD4E-CB4CCA059FC4}" type="datetimeFigureOut">
               <a:rPr lang="en-US" smtClean="0"/>
-              <a:t>7/18/2026</a:t>
+              <a:t>8/5/2026</a:t>
             </a:fld>
             <a:endParaRPr lang="en-US"/>
           </a:p>
@@ -3128,8 +3128,8 @@
         </p:nvSpPr>
         <p:spPr>
           <a:xfrm>
-            <a:off x="274320" y="182880"/>
-            <a:ext cx="11612880" cy="640080"/>
+            <a:off x="2863084" y="182880"/>
+            <a:ext cx="6435351" cy="584775"/>
           </a:xfrm>
           <a:prstGeom prst="rect">
             <a:avLst/>
@@ -3150,7 +3150,27 @@
               </a:defRPr>
             </a:pPr>
             <a:r>
-              <a:t>Лекция 3. Объекты Active Directory</a:t>
+              <a:rPr dirty="0" err="1"/>
+              <a:t>Лекция</a:t>
+            </a:r>
+            <a:r>
+              <a:rPr dirty="0"/>
+              <a:t> </a:t>
+            </a:r>
+            <a:r>
+              <a:rPr lang="ru-RU"/>
+              <a:t>5</a:t>
+            </a:r>
+            <a:r>
+              <a:t>. </a:t>
+            </a:r>
+            <a:r>
+              <a:rPr dirty="0" err="1"/>
+              <a:t>Объекты</a:t>
+            </a:r>
+            <a:r>
+              <a:rPr dirty="0"/>
+              <a:t> Active Directory</a:t>
             </a:r>
           </a:p>
         </p:txBody>
